--- a/中越詩歌/保護我的是耶和華_Đấng bảo vệ tôi là Đức Giê-hô-va.pptx
+++ b/中越詩歌/保護我的是耶和華_Đấng bảo vệ tôi là Đức Giê-hô-va.pptx
@@ -301,7 +301,7 @@
           <a:p>
             <a:fld id="{4708DAAA-A60A-4649-A77A-7F12CC5C96A6}" type="datetimeFigureOut">
               <a:rPr lang="vi-VN" smtClean="0"/>
-              <a:t>12/09/2024</a:t>
+              <a:t>30/09/2025</a:t>
             </a:fld>
             <a:endParaRPr lang="vi-VN"/>
           </a:p>
@@ -471,7 +471,7 @@
           <a:p>
             <a:fld id="{4708DAAA-A60A-4649-A77A-7F12CC5C96A6}" type="datetimeFigureOut">
               <a:rPr lang="vi-VN" smtClean="0"/>
-              <a:t>12/09/2024</a:t>
+              <a:t>30/09/2025</a:t>
             </a:fld>
             <a:endParaRPr lang="vi-VN"/>
           </a:p>
@@ -651,7 +651,7 @@
           <a:p>
             <a:fld id="{4708DAAA-A60A-4649-A77A-7F12CC5C96A6}" type="datetimeFigureOut">
               <a:rPr lang="vi-VN" smtClean="0"/>
-              <a:t>12/09/2024</a:t>
+              <a:t>30/09/2025</a:t>
             </a:fld>
             <a:endParaRPr lang="vi-VN"/>
           </a:p>
@@ -821,7 +821,7 @@
           <a:p>
             <a:fld id="{4708DAAA-A60A-4649-A77A-7F12CC5C96A6}" type="datetimeFigureOut">
               <a:rPr lang="vi-VN" smtClean="0"/>
-              <a:t>12/09/2024</a:t>
+              <a:t>30/09/2025</a:t>
             </a:fld>
             <a:endParaRPr lang="vi-VN"/>
           </a:p>
@@ -1067,7 +1067,7 @@
           <a:p>
             <a:fld id="{4708DAAA-A60A-4649-A77A-7F12CC5C96A6}" type="datetimeFigureOut">
               <a:rPr lang="vi-VN" smtClean="0"/>
-              <a:t>12/09/2024</a:t>
+              <a:t>30/09/2025</a:t>
             </a:fld>
             <a:endParaRPr lang="vi-VN"/>
           </a:p>
@@ -1355,7 +1355,7 @@
           <a:p>
             <a:fld id="{4708DAAA-A60A-4649-A77A-7F12CC5C96A6}" type="datetimeFigureOut">
               <a:rPr lang="vi-VN" smtClean="0"/>
-              <a:t>12/09/2024</a:t>
+              <a:t>30/09/2025</a:t>
             </a:fld>
             <a:endParaRPr lang="vi-VN"/>
           </a:p>
@@ -1777,7 +1777,7 @@
           <a:p>
             <a:fld id="{4708DAAA-A60A-4649-A77A-7F12CC5C96A6}" type="datetimeFigureOut">
               <a:rPr lang="vi-VN" smtClean="0"/>
-              <a:t>12/09/2024</a:t>
+              <a:t>30/09/2025</a:t>
             </a:fld>
             <a:endParaRPr lang="vi-VN"/>
           </a:p>
@@ -1895,7 +1895,7 @@
           <a:p>
             <a:fld id="{4708DAAA-A60A-4649-A77A-7F12CC5C96A6}" type="datetimeFigureOut">
               <a:rPr lang="vi-VN" smtClean="0"/>
-              <a:t>12/09/2024</a:t>
+              <a:t>30/09/2025</a:t>
             </a:fld>
             <a:endParaRPr lang="vi-VN"/>
           </a:p>
@@ -1990,7 +1990,7 @@
           <a:p>
             <a:fld id="{4708DAAA-A60A-4649-A77A-7F12CC5C96A6}" type="datetimeFigureOut">
               <a:rPr lang="vi-VN" smtClean="0"/>
-              <a:t>12/09/2024</a:t>
+              <a:t>30/09/2025</a:t>
             </a:fld>
             <a:endParaRPr lang="vi-VN"/>
           </a:p>
@@ -2267,7 +2267,7 @@
           <a:p>
             <a:fld id="{4708DAAA-A60A-4649-A77A-7F12CC5C96A6}" type="datetimeFigureOut">
               <a:rPr lang="vi-VN" smtClean="0"/>
-              <a:t>12/09/2024</a:t>
+              <a:t>30/09/2025</a:t>
             </a:fld>
             <a:endParaRPr lang="vi-VN"/>
           </a:p>
@@ -2524,7 +2524,7 @@
           <a:p>
             <a:fld id="{4708DAAA-A60A-4649-A77A-7F12CC5C96A6}" type="datetimeFigureOut">
               <a:rPr lang="vi-VN" smtClean="0"/>
-              <a:t>12/09/2024</a:t>
+              <a:t>30/09/2025</a:t>
             </a:fld>
             <a:endParaRPr lang="vi-VN"/>
           </a:p>
@@ -2740,7 +2740,7 @@
           <a:p>
             <a:fld id="{4708DAAA-A60A-4649-A77A-7F12CC5C96A6}" type="datetimeFigureOut">
               <a:rPr lang="vi-VN" smtClean="0"/>
-              <a:t>12/09/2024</a:t>
+              <a:t>30/09/2025</a:t>
             </a:fld>
             <a:endParaRPr lang="vi-VN"/>
           </a:p>
@@ -3227,7 +3227,7 @@
                 <a:ea typeface="微軟正黑體" pitchFamily="34" charset="-120"/>
                 <a:cs typeface="Times New Roman" panose="02020603050405020304" pitchFamily="18" charset="0"/>
               </a:rPr>
-              <a:t>Đấng</a:t>
+              <a:t>Đức</a:t>
             </a:r>
             <a:r>
               <a:rPr lang="en-US" sz="4800" b="1" i="1" dirty="0">
@@ -3263,7 +3263,7 @@
                 <a:ea typeface="微軟正黑體" pitchFamily="34" charset="-120"/>
                 <a:cs typeface="Times New Roman" panose="02020603050405020304" pitchFamily="18" charset="0"/>
               </a:rPr>
-              <a:t>bảo</a:t>
+              <a:t>Giê-hô-va</a:t>
             </a:r>
             <a:r>
               <a:rPr lang="en-US" sz="4800" b="1" i="1" dirty="0">
@@ -3299,7 +3299,7 @@
                 <a:ea typeface="微軟正黑體" pitchFamily="34" charset="-120"/>
                 <a:cs typeface="Times New Roman" panose="02020603050405020304" pitchFamily="18" charset="0"/>
               </a:rPr>
-              <a:t>vệ</a:t>
+              <a:t>là</a:t>
             </a:r>
             <a:r>
               <a:rPr lang="en-US" sz="4800" b="1" i="1" dirty="0">
@@ -3335,7 +3335,7 @@
                 <a:ea typeface="微軟正黑體" pitchFamily="34" charset="-120"/>
                 <a:cs typeface="Times New Roman" panose="02020603050405020304" pitchFamily="18" charset="0"/>
               </a:rPr>
-              <a:t>tôi</a:t>
+              <a:t>Đấng</a:t>
             </a:r>
             <a:r>
               <a:rPr lang="en-US" sz="4800" b="1" i="1" dirty="0">
@@ -3371,7 +3371,7 @@
                 <a:ea typeface="微軟正黑體" pitchFamily="34" charset="-120"/>
                 <a:cs typeface="Times New Roman" panose="02020603050405020304" pitchFamily="18" charset="0"/>
               </a:rPr>
-              <a:t>là</a:t>
+              <a:t>gìn</a:t>
             </a:r>
             <a:r>
               <a:rPr lang="en-US" sz="4800" b="1" i="1" dirty="0">
@@ -3407,7 +3407,7 @@
                 <a:ea typeface="微軟正黑體" pitchFamily="34" charset="-120"/>
                 <a:cs typeface="Times New Roman" panose="02020603050405020304" pitchFamily="18" charset="0"/>
               </a:rPr>
-              <a:t>Đức</a:t>
+              <a:t>giữ</a:t>
             </a:r>
             <a:r>
               <a:rPr lang="en-US" sz="4800" b="1" i="1" dirty="0">
@@ -3443,7 +3443,7 @@
                 <a:ea typeface="微軟正黑體" pitchFamily="34" charset="-120"/>
                 <a:cs typeface="Times New Roman" panose="02020603050405020304" pitchFamily="18" charset="0"/>
               </a:rPr>
-              <a:t>Giê-hô-va</a:t>
+              <a:t>tôi</a:t>
             </a:r>
             <a:endParaRPr lang="zh-TW" altLang="en-US" sz="4800" b="1" i="1" dirty="0">
               <a:solidFill>
@@ -3709,7 +3709,7 @@
                 <a:ea typeface="微軟正黑體" pitchFamily="34" charset="-120"/>
                 <a:cs typeface="Calibri" panose="020F0502020204030204" pitchFamily="34" charset="0"/>
               </a:rPr>
-              <a:t>Đấng bảo vệ tôi là Đức Giê-hô-va</a:t>
+              <a:t>Đức Giê-hô-va là Đấng gìn giữ tôi</a:t>
             </a:r>
             <a:endParaRPr lang="en-US" sz="4000" b="1" dirty="0">
               <a:solidFill>
@@ -4034,7 +4034,7 @@
                 <a:ea typeface="微軟正黑體" pitchFamily="34" charset="-120"/>
                 <a:cs typeface="Calibri" panose="020F0502020204030204" pitchFamily="34" charset="0"/>
               </a:rPr>
-              <a:t>Ngài ở bên phải che chở cho tôi</a:t>
+              <a:t>Đức Giê-hô-va là bóng che ở bên phải tôi</a:t>
             </a:r>
             <a:endParaRPr lang="en-US" sz="4000" b="1" dirty="0">
               <a:solidFill>
@@ -4359,7 +4359,7 @@
                 <a:ea typeface="微軟正黑體" pitchFamily="34" charset="-120"/>
                 <a:cs typeface="Calibri" panose="020F0502020204030204" pitchFamily="34" charset="0"/>
               </a:rPr>
-              <a:t>Ban ngày mặt trời không thể tổn thương tôi</a:t>
+              <a:t>Mặt trời sẽ không hại tôi lúc ban ngày</a:t>
             </a:r>
             <a:endParaRPr lang="en-US" sz="4000" b="1" dirty="0">
               <a:solidFill>
@@ -4684,7 +4684,7 @@
                 <a:ea typeface="微軟正黑體" pitchFamily="34" charset="-120"/>
                 <a:cs typeface="Calibri" panose="020F0502020204030204" pitchFamily="34" charset="0"/>
               </a:rPr>
-              <a:t>ban đêm mặt trăng cũng không thể gây hại cho tôi</a:t>
+              <a:t>Mặt trăng cũng không hại tôi trong ban đêm</a:t>
             </a:r>
             <a:endParaRPr lang="en-US" sz="4000" b="1" dirty="0">
               <a:solidFill>
@@ -5009,7 +5009,7 @@
                 <a:ea typeface="微軟正黑體" pitchFamily="34" charset="-120"/>
                 <a:cs typeface="Calibri" panose="020F0502020204030204" pitchFamily="34" charset="0"/>
               </a:rPr>
-              <a:t>Ngài sẽ bảo vệ tôi khỏi mọi tai họa</a:t>
+              <a:t>Ngài sẽ gìn giữ tôi khỏi mọi tai họa</a:t>
             </a:r>
             <a:endParaRPr lang="en-US" sz="4000" b="1" dirty="0">
               <a:solidFill>
@@ -5334,7 +5334,7 @@
                 <a:ea typeface="微軟正黑體" pitchFamily="34" charset="-120"/>
                 <a:cs typeface="Calibri" panose="020F0502020204030204" pitchFamily="34" charset="0"/>
               </a:rPr>
-              <a:t>Ngài sẽ bảo vệ tôi, bước đi vững vàng</a:t>
+              <a:t>Ngài sẽ gìn giữ tôi, bước đi vững vàng</a:t>
             </a:r>
             <a:endParaRPr lang="en-US" sz="4000" b="1" dirty="0">
               <a:solidFill>
@@ -5659,7 +5659,7 @@
                 <a:ea typeface="微軟正黑體" pitchFamily="34" charset="-120"/>
                 <a:cs typeface="Calibri" panose="020F0502020204030204" pitchFamily="34" charset="0"/>
               </a:rPr>
-              <a:t>Ngài sẽ bảo vệ tôi, luôn luôn bảo vệ tôi</a:t>
+              <a:t>Ngài sẽ gìn giữ tôi, luôn luôn gìn giữ tôi</a:t>
             </a:r>
             <a:endParaRPr lang="en-US" sz="4000" b="1" dirty="0">
               <a:solidFill>
@@ -5984,7 +5984,40 @@
                 <a:ea typeface="微軟正黑體" pitchFamily="34" charset="-120"/>
                 <a:cs typeface="Calibri" panose="020F0502020204030204" pitchFamily="34" charset="0"/>
               </a:rPr>
-              <a:t>Dù tôi đi đâu về đâu từ giờ cho đến muôn đời</a:t>
+              <a:t>Khi ra khi vào, </a:t>
+            </a:r>
+            <a:r>
+              <a:rPr lang="en-US" sz="4000" b="1" dirty="0" smtClean="0">
+                <a:solidFill>
+                  <a:srgbClr val="660033"/>
+                </a:solidFill>
+                <a:latin typeface="Times New Roman" panose="02020603050405020304" pitchFamily="18" charset="0"/>
+                <a:ea typeface="微軟正黑體" pitchFamily="34" charset="-120"/>
+                <a:cs typeface="Times New Roman" panose="02020603050405020304" pitchFamily="18" charset="0"/>
+              </a:rPr>
+              <a:t>t</a:t>
+            </a:r>
+            <a:r>
+              <a:rPr lang="vi-VN" sz="4000" b="1" dirty="0" smtClean="0">
+                <a:solidFill>
+                  <a:srgbClr val="660033"/>
+                </a:solidFill>
+                <a:latin typeface="+mj-lt"/>
+                <a:ea typeface="微軟正黑體" pitchFamily="34" charset="-120"/>
+                <a:cs typeface="Calibri" panose="020F0502020204030204" pitchFamily="34" charset="0"/>
+              </a:rPr>
+              <a:t>ừ </a:t>
+            </a:r>
+            <a:r>
+              <a:rPr lang="vi-VN" sz="4000" b="1" dirty="0">
+                <a:solidFill>
+                  <a:srgbClr val="660033"/>
+                </a:solidFill>
+                <a:latin typeface="+mj-lt"/>
+                <a:ea typeface="微軟正黑體" pitchFamily="34" charset="-120"/>
+                <a:cs typeface="Calibri" panose="020F0502020204030204" pitchFamily="34" charset="0"/>
+              </a:rPr>
+              <a:t>nay cho đến đời đời</a:t>
             </a:r>
             <a:endParaRPr lang="en-US" sz="4000" b="1" dirty="0">
               <a:solidFill>
